--- a/Slides/Semana 13/semana_13_slides.pptx
+++ b/Slides/Semana 13/semana_13_slides.pptx
@@ -798,7 +798,7 @@
 - "O que ainda falta documentar, e como vocês vão preencher essa lacuna?"
 - "Se a execução ainda não terminou, o que precisa acontecer para concluir até a Semana 15?"
 Avaliação nesta semana: continuidade da observação central de Execução e Documentação, segundo a Rubrica de Avaliação. Observam-se também Gestão do Projeto (comunicação proativa e ajuste do plano diante de pendências) e Interação com a Comunidade (qualidade dos registros complementares coletados).
-Fonte: Plano Semanal Semana 13, Cronograma, CLAUDE.md, COURSE_CONTEXT.md, PEDAGOGICAL_RULES.md, EXTENSION_PROJECT_GUIDE.md.</a:t>
+Fonte: Plano Semanal Semana 13, Cronograma.</a:t>
             </a:r>
             <a:endParaRPr lang="en-US" dirty="0"/>
           </a:p>
